--- a/docs/songs/i reach up high.pptx
+++ b/docs/songs/i reach up high.pptx
@@ -8,7 +8,9 @@
     <p:sldId id="465" r:id="rId2"/>
     <p:sldId id="466" r:id="rId3"/>
     <p:sldId id="467" r:id="rId4"/>
-    <p:sldId id="474" r:id="rId5"/>
+    <p:sldId id="475" r:id="rId5"/>
+    <p:sldId id="474" r:id="rId6"/>
+    <p:sldId id="476" r:id="rId7"/>
   </p:sldIdLst>
   <p:sldSz cx="9144000" cy="6858000" type="screen4x3"/>
   <p:notesSz cx="6858000" cy="9144000"/>
@@ -308,7 +310,7 @@
             <a:fld id="{26EA1CF3-4A15-4CBF-9A5A-6A56C368BE71}" type="datetimeFigureOut">
               <a:rPr lang="en-GB" smtClean="0"/>
               <a:pPr/>
-              <a:t>13/10/2024</a:t>
+              <a:t>24/08/2026</a:t>
             </a:fld>
             <a:endParaRPr lang="en-GB"/>
           </a:p>
@@ -475,7 +477,7 @@
             <a:fld id="{26EA1CF3-4A15-4CBF-9A5A-6A56C368BE71}" type="datetimeFigureOut">
               <a:rPr lang="en-GB" smtClean="0"/>
               <a:pPr/>
-              <a:t>13/10/2024</a:t>
+              <a:t>24/08/2026</a:t>
             </a:fld>
             <a:endParaRPr lang="en-GB"/>
           </a:p>
@@ -652,7 +654,7 @@
             <a:fld id="{26EA1CF3-4A15-4CBF-9A5A-6A56C368BE71}" type="datetimeFigureOut">
               <a:rPr lang="en-GB" smtClean="0"/>
               <a:pPr/>
-              <a:t>13/10/2024</a:t>
+              <a:t>24/08/2026</a:t>
             </a:fld>
             <a:endParaRPr lang="en-GB"/>
           </a:p>
@@ -819,7 +821,7 @@
             <a:fld id="{26EA1CF3-4A15-4CBF-9A5A-6A56C368BE71}" type="datetimeFigureOut">
               <a:rPr lang="en-GB" smtClean="0"/>
               <a:pPr/>
-              <a:t>13/10/2024</a:t>
+              <a:t>24/08/2026</a:t>
             </a:fld>
             <a:endParaRPr lang="en-GB"/>
           </a:p>
@@ -1062,7 +1064,7 @@
             <a:fld id="{26EA1CF3-4A15-4CBF-9A5A-6A56C368BE71}" type="datetimeFigureOut">
               <a:rPr lang="en-GB" smtClean="0"/>
               <a:pPr/>
-              <a:t>13/10/2024</a:t>
+              <a:t>24/08/2026</a:t>
             </a:fld>
             <a:endParaRPr lang="en-GB"/>
           </a:p>
@@ -1347,7 +1349,7 @@
             <a:fld id="{26EA1CF3-4A15-4CBF-9A5A-6A56C368BE71}" type="datetimeFigureOut">
               <a:rPr lang="en-GB" smtClean="0"/>
               <a:pPr/>
-              <a:t>13/10/2024</a:t>
+              <a:t>24/08/2026</a:t>
             </a:fld>
             <a:endParaRPr lang="en-GB"/>
           </a:p>
@@ -1766,7 +1768,7 @@
             <a:fld id="{26EA1CF3-4A15-4CBF-9A5A-6A56C368BE71}" type="datetimeFigureOut">
               <a:rPr lang="en-GB" smtClean="0"/>
               <a:pPr/>
-              <a:t>13/10/2024</a:t>
+              <a:t>24/08/2026</a:t>
             </a:fld>
             <a:endParaRPr lang="en-GB"/>
           </a:p>
@@ -1881,7 +1883,7 @@
             <a:fld id="{26EA1CF3-4A15-4CBF-9A5A-6A56C368BE71}" type="datetimeFigureOut">
               <a:rPr lang="en-GB" smtClean="0"/>
               <a:pPr/>
-              <a:t>13/10/2024</a:t>
+              <a:t>24/08/2026</a:t>
             </a:fld>
             <a:endParaRPr lang="en-GB"/>
           </a:p>
@@ -1973,7 +1975,7 @@
             <a:fld id="{26EA1CF3-4A15-4CBF-9A5A-6A56C368BE71}" type="datetimeFigureOut">
               <a:rPr lang="en-GB" smtClean="0"/>
               <a:pPr/>
-              <a:t>13/10/2024</a:t>
+              <a:t>24/08/2026</a:t>
             </a:fld>
             <a:endParaRPr lang="en-GB"/>
           </a:p>
@@ -2247,7 +2249,7 @@
             <a:fld id="{26EA1CF3-4A15-4CBF-9A5A-6A56C368BE71}" type="datetimeFigureOut">
               <a:rPr lang="en-GB" smtClean="0"/>
               <a:pPr/>
-              <a:t>13/10/2024</a:t>
+              <a:t>24/08/2026</a:t>
             </a:fld>
             <a:endParaRPr lang="en-GB"/>
           </a:p>
@@ -2497,7 +2499,7 @@
             <a:fld id="{26EA1CF3-4A15-4CBF-9A5A-6A56C368BE71}" type="datetimeFigureOut">
               <a:rPr lang="en-GB" smtClean="0"/>
               <a:pPr/>
-              <a:t>13/10/2024</a:t>
+              <a:t>24/08/2026</a:t>
             </a:fld>
             <a:endParaRPr lang="en-GB"/>
           </a:p>
@@ -2710,7 +2712,7 @@
             <a:fld id="{26EA1CF3-4A15-4CBF-9A5A-6A56C368BE71}" type="datetimeFigureOut">
               <a:rPr lang="en-GB" smtClean="0"/>
               <a:pPr/>
-              <a:t>13/10/2024</a:t>
+              <a:t>24/08/2026</a:t>
             </a:fld>
             <a:endParaRPr lang="en-GB"/>
           </a:p>
@@ -3431,7 +3433,7 @@
                   <a:schemeClr val="bg1"/>
                 </a:solidFill>
               </a:rPr>
-              <a:t>1/3</a:t>
+              <a:t>1/5</a:t>
             </a:r>
           </a:p>
         </p:txBody>
@@ -3581,7 +3583,7 @@
                   <a:schemeClr val="bg1"/>
                 </a:solidFill>
               </a:rPr>
-              <a:t>2/3</a:t>
+              <a:t>2/5</a:t>
             </a:r>
           </a:p>
         </p:txBody>
@@ -3604,6 +3606,230 @@
   <p:cSld>
     <p:spTree>
       <p:nvGrpSpPr>
+        <p:cNvPr id="1" name="">
+          <a:extLst>
+            <a:ext uri="{FF2B5EF4-FFF2-40B4-BE49-F238E27FC236}">
+              <a16:creationId xmlns:a16="http://schemas.microsoft.com/office/drawing/2014/main" id="{841AD91A-DFDD-48AC-0F00-213B2FF258C3}"/>
+            </a:ext>
+          </a:extLst>
+        </p:cNvPr>
+        <p:cNvGrpSpPr/>
+        <p:nvPr/>
+      </p:nvGrpSpPr>
+      <p:grpSpPr>
+        <a:xfrm>
+          <a:off x="0" y="0"/>
+          <a:ext cx="0" cy="0"/>
+          <a:chOff x="0" y="0"/>
+          <a:chExt cx="0" cy="0"/>
+        </a:xfrm>
+      </p:grpSpPr>
+      <p:sp>
+        <p:nvSpPr>
+          <p:cNvPr id="3" name="Subtitle 2">
+            <a:extLst>
+              <a:ext uri="{FF2B5EF4-FFF2-40B4-BE49-F238E27FC236}">
+                <a16:creationId xmlns:a16="http://schemas.microsoft.com/office/drawing/2014/main" id="{A82F09A0-5E24-0651-30E4-786C052C8B2D}"/>
+              </a:ext>
+            </a:extLst>
+          </p:cNvPr>
+          <p:cNvSpPr>
+            <a:spLocks noGrp="1"/>
+          </p:cNvSpPr>
+          <p:nvPr>
+            <p:ph type="subTitle" idx="1"/>
+          </p:nvPr>
+        </p:nvSpPr>
+        <p:spPr>
+          <a:xfrm>
+            <a:off x="251520" y="692696"/>
+            <a:ext cx="8640960" cy="6480720"/>
+          </a:xfrm>
+        </p:spPr>
+        <p:txBody>
+          <a:bodyPr>
+            <a:noAutofit/>
+          </a:bodyPr>
+          <a:lstStyle/>
+          <a:p>
+            <a:pPr>
+              <a:spcBef>
+                <a:spcPts val="0"/>
+              </a:spcBef>
+            </a:pPr>
+            <a:r>
+              <a:rPr lang="en-GB" sz="3600" dirty="0">
+                <a:solidFill>
+                  <a:schemeClr val="bg1"/>
+                </a:solidFill>
+              </a:rPr>
+              <a:t>I reach up high I touch the ground</a:t>
+            </a:r>
+          </a:p>
+          <a:p>
+            <a:pPr>
+              <a:spcBef>
+                <a:spcPts val="0"/>
+              </a:spcBef>
+            </a:pPr>
+            <a:r>
+              <a:rPr lang="en-GB" sz="3600" dirty="0">
+                <a:solidFill>
+                  <a:schemeClr val="bg1"/>
+                </a:solidFill>
+              </a:rPr>
+              <a:t>I stomp my feet and turn around</a:t>
+            </a:r>
+          </a:p>
+          <a:p>
+            <a:pPr>
+              <a:spcBef>
+                <a:spcPts val="0"/>
+              </a:spcBef>
+            </a:pPr>
+            <a:r>
+              <a:rPr lang="en-GB" sz="3600" dirty="0">
+                <a:solidFill>
+                  <a:schemeClr val="bg1"/>
+                </a:solidFill>
+              </a:rPr>
+              <a:t>I've got to (woo woo) </a:t>
+            </a:r>
+            <a:br>
+              <a:rPr lang="en-GB" sz="3600" dirty="0">
+                <a:solidFill>
+                  <a:schemeClr val="bg1"/>
+                </a:solidFill>
+              </a:rPr>
+            </a:br>
+            <a:r>
+              <a:rPr lang="en-GB" sz="3600" dirty="0">
+                <a:solidFill>
+                  <a:schemeClr val="bg1"/>
+                </a:solidFill>
+              </a:rPr>
+              <a:t>Praise the Lord</a:t>
+            </a:r>
+          </a:p>
+          <a:p>
+            <a:pPr>
+              <a:spcBef>
+                <a:spcPts val="0"/>
+              </a:spcBef>
+            </a:pPr>
+            <a:r>
+              <a:rPr lang="en-GB" sz="3600" dirty="0">
+                <a:solidFill>
+                  <a:schemeClr val="bg1"/>
+                </a:solidFill>
+              </a:rPr>
+              <a:t>I jump and dance with all my might</a:t>
+            </a:r>
+          </a:p>
+          <a:p>
+            <a:pPr>
+              <a:spcBef>
+                <a:spcPts val="0"/>
+              </a:spcBef>
+            </a:pPr>
+            <a:r>
+              <a:rPr lang="en-GB" sz="3600" dirty="0">
+                <a:solidFill>
+                  <a:schemeClr val="bg1"/>
+                </a:solidFill>
+              </a:rPr>
+              <a:t>I might look funny but that's alright</a:t>
+            </a:r>
+          </a:p>
+          <a:p>
+            <a:pPr>
+              <a:spcBef>
+                <a:spcPts val="0"/>
+              </a:spcBef>
+            </a:pPr>
+            <a:r>
+              <a:rPr lang="en-GB" sz="3600" dirty="0">
+                <a:solidFill>
+                  <a:schemeClr val="bg1"/>
+                </a:solidFill>
+              </a:rPr>
+              <a:t>I've got to (woo woo) </a:t>
+            </a:r>
+          </a:p>
+          <a:p>
+            <a:pPr>
+              <a:spcBef>
+                <a:spcPts val="0"/>
+              </a:spcBef>
+            </a:pPr>
+            <a:r>
+              <a:rPr lang="en-GB" sz="3600" dirty="0">
+                <a:solidFill>
+                  <a:schemeClr val="bg1"/>
+                </a:solidFill>
+              </a:rPr>
+              <a:t>Praise my Lord</a:t>
+            </a:r>
+          </a:p>
+        </p:txBody>
+      </p:sp>
+      <p:sp>
+        <p:nvSpPr>
+          <p:cNvPr id="4" name="TextBox 3">
+            <a:extLst>
+              <a:ext uri="{FF2B5EF4-FFF2-40B4-BE49-F238E27FC236}">
+                <a16:creationId xmlns:a16="http://schemas.microsoft.com/office/drawing/2014/main" id="{7482E214-951C-FED2-A2CF-07F173815832}"/>
+              </a:ext>
+            </a:extLst>
+          </p:cNvPr>
+          <p:cNvSpPr txBox="1"/>
+          <p:nvPr/>
+        </p:nvSpPr>
+        <p:spPr>
+          <a:xfrm>
+            <a:off x="8529729" y="0"/>
+            <a:ext cx="628698" cy="461665"/>
+          </a:xfrm>
+          <a:prstGeom prst="rect">
+            <a:avLst/>
+          </a:prstGeom>
+          <a:noFill/>
+        </p:spPr>
+        <p:txBody>
+          <a:bodyPr wrap="none" rtlCol="0">
+            <a:spAutoFit/>
+          </a:bodyPr>
+          <a:lstStyle/>
+          <a:p>
+            <a:r>
+              <a:rPr lang="en-GB" sz="2400" b="1" dirty="0">
+                <a:solidFill>
+                  <a:schemeClr val="bg1"/>
+                </a:solidFill>
+              </a:rPr>
+              <a:t>3/5</a:t>
+            </a:r>
+          </a:p>
+        </p:txBody>
+      </p:sp>
+    </p:spTree>
+    <p:extLst>
+      <p:ext uri="{BB962C8B-B14F-4D97-AF65-F5344CB8AC3E}">
+        <p14:creationId xmlns:p14="http://schemas.microsoft.com/office/powerpoint/2010/main" val="2991418705"/>
+      </p:ext>
+    </p:extLst>
+  </p:cSld>
+  <p:clrMapOvr>
+    <a:masterClrMapping/>
+  </p:clrMapOvr>
+</p:sld>
+</file>
+
+<file path=ppt/slides/slide5.xml><?xml version="1.0" encoding="utf-8"?>
+<p:sld xmlns:a="http://schemas.openxmlformats.org/drawingml/2006/main" xmlns:r="http://schemas.openxmlformats.org/officeDocument/2006/relationships" xmlns:p="http://schemas.openxmlformats.org/presentationml/2006/main">
+  <p:cSld>
+    <p:spTree>
+      <p:nvGrpSpPr>
         <p:cNvPr id="1" name=""/>
         <p:cNvGrpSpPr/>
         <p:nvPr/>
@@ -3739,7 +3965,7 @@
                   <a:schemeClr val="bg1"/>
                 </a:solidFill>
               </a:rPr>
-              <a:t>3/3</a:t>
+              <a:t>4/5</a:t>
             </a:r>
           </a:p>
         </p:txBody>
@@ -3748,6 +3974,230 @@
     <p:extLst>
       <p:ext uri="{BB962C8B-B14F-4D97-AF65-F5344CB8AC3E}">
         <p14:creationId xmlns:p14="http://schemas.microsoft.com/office/powerpoint/2010/main" val="1242897186"/>
+      </p:ext>
+    </p:extLst>
+  </p:cSld>
+  <p:clrMapOvr>
+    <a:masterClrMapping/>
+  </p:clrMapOvr>
+</p:sld>
+</file>
+
+<file path=ppt/slides/slide6.xml><?xml version="1.0" encoding="utf-8"?>
+<p:sld xmlns:a="http://schemas.openxmlformats.org/drawingml/2006/main" xmlns:r="http://schemas.openxmlformats.org/officeDocument/2006/relationships" xmlns:p="http://schemas.openxmlformats.org/presentationml/2006/main">
+  <p:cSld>
+    <p:spTree>
+      <p:nvGrpSpPr>
+        <p:cNvPr id="1" name="">
+          <a:extLst>
+            <a:ext uri="{FF2B5EF4-FFF2-40B4-BE49-F238E27FC236}">
+              <a16:creationId xmlns:a16="http://schemas.microsoft.com/office/drawing/2014/main" id="{00CD5E1C-C6D9-FDE5-7657-AF1C5BFD53A3}"/>
+            </a:ext>
+          </a:extLst>
+        </p:cNvPr>
+        <p:cNvGrpSpPr/>
+        <p:nvPr/>
+      </p:nvGrpSpPr>
+      <p:grpSpPr>
+        <a:xfrm>
+          <a:off x="0" y="0"/>
+          <a:ext cx="0" cy="0"/>
+          <a:chOff x="0" y="0"/>
+          <a:chExt cx="0" cy="0"/>
+        </a:xfrm>
+      </p:grpSpPr>
+      <p:sp>
+        <p:nvSpPr>
+          <p:cNvPr id="3" name="Subtitle 2">
+            <a:extLst>
+              <a:ext uri="{FF2B5EF4-FFF2-40B4-BE49-F238E27FC236}">
+                <a16:creationId xmlns:a16="http://schemas.microsoft.com/office/drawing/2014/main" id="{0865DCCB-489A-5614-E889-5897AEB04F2D}"/>
+              </a:ext>
+            </a:extLst>
+          </p:cNvPr>
+          <p:cNvSpPr>
+            <a:spLocks noGrp="1"/>
+          </p:cNvSpPr>
+          <p:nvPr>
+            <p:ph type="subTitle" idx="1"/>
+          </p:nvPr>
+        </p:nvSpPr>
+        <p:spPr>
+          <a:xfrm>
+            <a:off x="251520" y="692696"/>
+            <a:ext cx="8640960" cy="6480720"/>
+          </a:xfrm>
+        </p:spPr>
+        <p:txBody>
+          <a:bodyPr>
+            <a:noAutofit/>
+          </a:bodyPr>
+          <a:lstStyle/>
+          <a:p>
+            <a:pPr>
+              <a:spcBef>
+                <a:spcPts val="0"/>
+              </a:spcBef>
+            </a:pPr>
+            <a:r>
+              <a:rPr lang="en-GB" sz="3600" dirty="0">
+                <a:solidFill>
+                  <a:schemeClr val="bg1"/>
+                </a:solidFill>
+              </a:rPr>
+              <a:t>I reach up high I touch the ground</a:t>
+            </a:r>
+          </a:p>
+          <a:p>
+            <a:pPr>
+              <a:spcBef>
+                <a:spcPts val="0"/>
+              </a:spcBef>
+            </a:pPr>
+            <a:r>
+              <a:rPr lang="en-GB" sz="3600" dirty="0">
+                <a:solidFill>
+                  <a:schemeClr val="bg1"/>
+                </a:solidFill>
+              </a:rPr>
+              <a:t>I stomp my feet and turn around</a:t>
+            </a:r>
+          </a:p>
+          <a:p>
+            <a:pPr>
+              <a:spcBef>
+                <a:spcPts val="0"/>
+              </a:spcBef>
+            </a:pPr>
+            <a:r>
+              <a:rPr lang="en-GB" sz="3600" dirty="0">
+                <a:solidFill>
+                  <a:schemeClr val="bg1"/>
+                </a:solidFill>
+              </a:rPr>
+              <a:t>I've got to (woo woo) </a:t>
+            </a:r>
+            <a:br>
+              <a:rPr lang="en-GB" sz="3600" dirty="0">
+                <a:solidFill>
+                  <a:schemeClr val="bg1"/>
+                </a:solidFill>
+              </a:rPr>
+            </a:br>
+            <a:r>
+              <a:rPr lang="en-GB" sz="3600" dirty="0">
+                <a:solidFill>
+                  <a:schemeClr val="bg1"/>
+                </a:solidFill>
+              </a:rPr>
+              <a:t>Praise the Lord</a:t>
+            </a:r>
+          </a:p>
+          <a:p>
+            <a:pPr>
+              <a:spcBef>
+                <a:spcPts val="0"/>
+              </a:spcBef>
+            </a:pPr>
+            <a:r>
+              <a:rPr lang="en-GB" sz="3600" dirty="0">
+                <a:solidFill>
+                  <a:schemeClr val="bg1"/>
+                </a:solidFill>
+              </a:rPr>
+              <a:t>I jump and dance with all my might</a:t>
+            </a:r>
+          </a:p>
+          <a:p>
+            <a:pPr>
+              <a:spcBef>
+                <a:spcPts val="0"/>
+              </a:spcBef>
+            </a:pPr>
+            <a:r>
+              <a:rPr lang="en-GB" sz="3600" dirty="0">
+                <a:solidFill>
+                  <a:schemeClr val="bg1"/>
+                </a:solidFill>
+              </a:rPr>
+              <a:t>I might look funny but that's alright</a:t>
+            </a:r>
+          </a:p>
+          <a:p>
+            <a:pPr>
+              <a:spcBef>
+                <a:spcPts val="0"/>
+              </a:spcBef>
+            </a:pPr>
+            <a:r>
+              <a:rPr lang="en-GB" sz="3600" dirty="0">
+                <a:solidFill>
+                  <a:schemeClr val="bg1"/>
+                </a:solidFill>
+              </a:rPr>
+              <a:t>I've got to (woo woo) </a:t>
+            </a:r>
+          </a:p>
+          <a:p>
+            <a:pPr>
+              <a:spcBef>
+                <a:spcPts val="0"/>
+              </a:spcBef>
+            </a:pPr>
+            <a:r>
+              <a:rPr lang="en-GB" sz="3600" dirty="0">
+                <a:solidFill>
+                  <a:schemeClr val="bg1"/>
+                </a:solidFill>
+              </a:rPr>
+              <a:t>Praise my Lord</a:t>
+            </a:r>
+          </a:p>
+        </p:txBody>
+      </p:sp>
+      <p:sp>
+        <p:nvSpPr>
+          <p:cNvPr id="4" name="TextBox 3">
+            <a:extLst>
+              <a:ext uri="{FF2B5EF4-FFF2-40B4-BE49-F238E27FC236}">
+                <a16:creationId xmlns:a16="http://schemas.microsoft.com/office/drawing/2014/main" id="{34D8AAA2-1D7A-38CB-01BC-7843C494E6E2}"/>
+              </a:ext>
+            </a:extLst>
+          </p:cNvPr>
+          <p:cNvSpPr txBox="1"/>
+          <p:nvPr/>
+        </p:nvSpPr>
+        <p:spPr>
+          <a:xfrm>
+            <a:off x="8529729" y="0"/>
+            <a:ext cx="628698" cy="461665"/>
+          </a:xfrm>
+          <a:prstGeom prst="rect">
+            <a:avLst/>
+          </a:prstGeom>
+          <a:noFill/>
+        </p:spPr>
+        <p:txBody>
+          <a:bodyPr wrap="none" rtlCol="0">
+            <a:spAutoFit/>
+          </a:bodyPr>
+          <a:lstStyle/>
+          <a:p>
+            <a:r>
+              <a:rPr lang="en-GB" sz="2400" b="1" dirty="0">
+                <a:solidFill>
+                  <a:schemeClr val="bg1"/>
+                </a:solidFill>
+              </a:rPr>
+              <a:t>5/5</a:t>
+            </a:r>
+          </a:p>
+        </p:txBody>
+      </p:sp>
+    </p:spTree>
+    <p:extLst>
+      <p:ext uri="{BB962C8B-B14F-4D97-AF65-F5344CB8AC3E}">
+        <p14:creationId xmlns:p14="http://schemas.microsoft.com/office/powerpoint/2010/main" val="748662449"/>
       </p:ext>
     </p:extLst>
   </p:cSld>
